--- a/data/DAG_editable.pptx
+++ b/data/DAG_editable.pptx
@@ -4313,7 +4313,7 @@
           <a:p>
             <a:pPr algn="ctr"/>
             <a:r>
-              <a:rPr sz="1600" b="1">
+              <a:rPr sz="1600" b="1" dirty="0">
                 <a:solidFill>
                   <a:srgbClr val="FFFFFF"/>
                 </a:solidFill>
@@ -4709,7 +4709,7 @@
         </p:nvSpPr>
         <p:spPr>
           <a:xfrm>
-            <a:off x="1571882" y="11987342"/>
+            <a:off x="1571882" y="11371430"/>
             <a:ext cx="914400" cy="914400"/>
           </a:xfrm>
           <a:prstGeom prst="ellipse">
@@ -4745,13 +4745,18 @@
           <a:p>
             <a:pPr algn="ctr"/>
             <a:r>
-              <a:rPr sz="1600" b="1">
+              <a:rPr lang="en-US" sz="1600" b="1" dirty="0">
                 <a:solidFill>
                   <a:srgbClr val="FFFFFF"/>
                 </a:solidFill>
               </a:rPr>
-              <a:t>Reticulocyte</a:t>
-            </a:r>
+              <a:t>BFU</a:t>
+            </a:r>
+            <a:endParaRPr sz="1600" b="1" dirty="0">
+              <a:solidFill>
+                <a:srgbClr val="FFFFFF"/>
+              </a:solidFill>
+            </a:endParaRPr>
           </a:p>
         </p:txBody>
       </p:sp>
@@ -6043,14 +6048,13 @@
           <p:cNvCxnSpPr>
             <a:cxnSpLocks/>
             <a:stCxn id="20" idx="4"/>
-            <a:endCxn id="25" idx="0"/>
           </p:cNvCxnSpPr>
           <p:nvPr/>
         </p:nvCxnSpPr>
         <p:spPr>
           <a:xfrm>
             <a:off x="2029082" y="10985852"/>
-            <a:ext cx="0" cy="1001490"/>
+            <a:ext cx="0" cy="409858"/>
           </a:xfrm>
           <a:prstGeom prst="line">
             <a:avLst/>
@@ -6206,15 +6210,15 @@
           <p:cNvPr id="60" name="Connector 59"/>
           <p:cNvCxnSpPr>
             <a:cxnSpLocks/>
-            <a:stCxn id="25" idx="4"/>
+            <a:stCxn id="265" idx="4"/>
             <a:endCxn id="29" idx="0"/>
           </p:cNvCxnSpPr>
           <p:nvPr/>
         </p:nvCxnSpPr>
         <p:spPr>
           <a:xfrm>
-            <a:off x="2029082" y="12901742"/>
-            <a:ext cx="0" cy="674910"/>
+            <a:off x="2029082" y="13372011"/>
+            <a:ext cx="0" cy="204641"/>
           </a:xfrm>
           <a:prstGeom prst="line">
             <a:avLst/>
@@ -7210,6 +7214,371 @@
           </a:graphicData>
         </a:graphic>
       </p:graphicFrame>
+      <p:sp>
+        <p:nvSpPr>
+          <p:cNvPr id="265" name="Oval 24">
+            <a:extLst>
+              <a:ext uri="{FF2B5EF4-FFF2-40B4-BE49-F238E27FC236}">
+                <a16:creationId xmlns:a16="http://schemas.microsoft.com/office/drawing/2014/main" id="{5AE51B2C-588A-5F82-4AA7-021A5331AF7E}"/>
+              </a:ext>
+            </a:extLst>
+          </p:cNvPr>
+          <p:cNvSpPr/>
+          <p:nvPr/>
+        </p:nvSpPr>
+        <p:spPr>
+          <a:xfrm>
+            <a:off x="1571882" y="12457611"/>
+            <a:ext cx="914400" cy="914400"/>
+          </a:xfrm>
+          <a:prstGeom prst="ellipse">
+            <a:avLst/>
+          </a:prstGeom>
+          <a:solidFill>
+            <a:schemeClr val="accent6"/>
+          </a:solidFill>
+          <a:ln w="12700">
+            <a:solidFill>
+              <a:srgbClr val="FFFFFF"/>
+            </a:solidFill>
+          </a:ln>
+          <a:effectLst/>
+        </p:spPr>
+        <p:style>
+          <a:lnRef idx="1">
+            <a:schemeClr val="accent1"/>
+          </a:lnRef>
+          <a:fillRef idx="3">
+            <a:schemeClr val="accent1"/>
+          </a:fillRef>
+          <a:effectRef idx="2">
+            <a:schemeClr val="accent1"/>
+          </a:effectRef>
+          <a:fontRef idx="minor">
+            <a:schemeClr val="lt1"/>
+          </a:fontRef>
+        </p:style>
+        <p:txBody>
+          <a:bodyPr wrap="square" lIns="18000" tIns="9000" rIns="18000" bIns="9000" rtlCol="0" anchor="ctr"/>
+          <a:lstStyle/>
+          <a:p>
+            <a:pPr algn="ctr"/>
+            <a:r>
+              <a:rPr lang="en-US" sz="1600" b="1" dirty="0">
+                <a:solidFill>
+                  <a:srgbClr val="FFFFFF"/>
+                </a:solidFill>
+              </a:rPr>
+              <a:t>CFU</a:t>
+            </a:r>
+            <a:endParaRPr sz="1600" b="1" dirty="0">
+              <a:solidFill>
+                <a:srgbClr val="FFFFFF"/>
+              </a:solidFill>
+            </a:endParaRPr>
+          </a:p>
+        </p:txBody>
+      </p:sp>
+      <p:cxnSp>
+        <p:nvCxnSpPr>
+          <p:cNvPr id="267" name="Connector 59">
+            <a:extLst>
+              <a:ext uri="{FF2B5EF4-FFF2-40B4-BE49-F238E27FC236}">
+                <a16:creationId xmlns:a16="http://schemas.microsoft.com/office/drawing/2014/main" id="{B43613FD-3181-1AE8-A031-D4D865A2DA07}"/>
+              </a:ext>
+            </a:extLst>
+          </p:cNvPr>
+          <p:cNvCxnSpPr>
+            <a:cxnSpLocks/>
+            <a:endCxn id="265" idx="0"/>
+          </p:cNvCxnSpPr>
+          <p:nvPr/>
+        </p:nvCxnSpPr>
+        <p:spPr>
+          <a:xfrm>
+            <a:off x="2029082" y="12252970"/>
+            <a:ext cx="0" cy="204641"/>
+          </a:xfrm>
+          <a:prstGeom prst="line">
+            <a:avLst/>
+          </a:prstGeom>
+          <a:ln w="12700">
+            <a:solidFill>
+              <a:srgbClr val="2C3E50"/>
+            </a:solidFill>
+            <a:tailEnd type="triangle" w="med"/>
+          </a:ln>
+          <a:effectLst/>
+        </p:spPr>
+        <p:style>
+          <a:lnRef idx="2">
+            <a:schemeClr val="accent1"/>
+          </a:lnRef>
+          <a:fillRef idx="0">
+            <a:schemeClr val="accent1"/>
+          </a:fillRef>
+          <a:effectRef idx="1">
+            <a:schemeClr val="accent1"/>
+          </a:effectRef>
+          <a:fontRef idx="minor">
+            <a:schemeClr val="tx1"/>
+          </a:fontRef>
+        </p:style>
+      </p:cxnSp>
+      <p:sp>
+        <p:nvSpPr>
+          <p:cNvPr id="269" name="Oval 16">
+            <a:extLst>
+              <a:ext uri="{FF2B5EF4-FFF2-40B4-BE49-F238E27FC236}">
+                <a16:creationId xmlns:a16="http://schemas.microsoft.com/office/drawing/2014/main" id="{30E4F92D-1B8B-7FAE-BBD3-E656D1D51B6A}"/>
+              </a:ext>
+            </a:extLst>
+          </p:cNvPr>
+          <p:cNvSpPr/>
+          <p:nvPr/>
+        </p:nvSpPr>
+        <p:spPr>
+          <a:xfrm>
+            <a:off x="3252451" y="9388622"/>
+            <a:ext cx="914400" cy="914400"/>
+          </a:xfrm>
+          <a:prstGeom prst="ellipse">
+            <a:avLst/>
+          </a:prstGeom>
+          <a:solidFill>
+            <a:srgbClr val="E3920E"/>
+          </a:solidFill>
+          <a:ln w="12700">
+            <a:solidFill>
+              <a:srgbClr val="FFFFFF"/>
+            </a:solidFill>
+          </a:ln>
+          <a:effectLst/>
+        </p:spPr>
+        <p:style>
+          <a:lnRef idx="1">
+            <a:schemeClr val="accent1"/>
+          </a:lnRef>
+          <a:fillRef idx="3">
+            <a:schemeClr val="accent1"/>
+          </a:fillRef>
+          <a:effectRef idx="2">
+            <a:schemeClr val="accent1"/>
+          </a:effectRef>
+          <a:fontRef idx="minor">
+            <a:schemeClr val="lt1"/>
+          </a:fontRef>
+        </p:style>
+        <p:txBody>
+          <a:bodyPr wrap="square" lIns="18000" tIns="9000" rIns="18000" bIns="9000" rtlCol="0" anchor="ctr"/>
+          <a:lstStyle/>
+          <a:p>
+            <a:pPr algn="ctr"/>
+            <a:r>
+              <a:rPr lang="en-US" sz="1100" b="1" dirty="0">
+                <a:solidFill>
+                  <a:srgbClr val="FFFFFF"/>
+                </a:solidFill>
+              </a:rPr>
+              <a:t>CD14</a:t>
+            </a:r>
+            <a:br>
+              <a:rPr lang="en-US" sz="1100" b="1" dirty="0">
+                <a:solidFill>
+                  <a:srgbClr val="FFFFFF"/>
+                </a:solidFill>
+              </a:rPr>
+            </a:br>
+            <a:r>
+              <a:rPr lang="en-US" sz="1100" b="1" dirty="0">
+                <a:solidFill>
+                  <a:srgbClr val="FFFFFF"/>
+                </a:solidFill>
+              </a:rPr>
+              <a:t>Monocyte</a:t>
+            </a:r>
+            <a:endParaRPr sz="1100" b="1" dirty="0">
+              <a:solidFill>
+                <a:srgbClr val="FFFFFF"/>
+              </a:solidFill>
+            </a:endParaRPr>
+          </a:p>
+        </p:txBody>
+      </p:sp>
+      <p:sp>
+        <p:nvSpPr>
+          <p:cNvPr id="270" name="Oval 16">
+            <a:extLst>
+              <a:ext uri="{FF2B5EF4-FFF2-40B4-BE49-F238E27FC236}">
+                <a16:creationId xmlns:a16="http://schemas.microsoft.com/office/drawing/2014/main" id="{0B113E7E-7A3B-8819-D8CB-E54FB861F823}"/>
+              </a:ext>
+            </a:extLst>
+          </p:cNvPr>
+          <p:cNvSpPr/>
+          <p:nvPr/>
+        </p:nvSpPr>
+        <p:spPr>
+          <a:xfrm>
+            <a:off x="4635213" y="9388622"/>
+            <a:ext cx="914400" cy="914400"/>
+          </a:xfrm>
+          <a:prstGeom prst="ellipse">
+            <a:avLst/>
+          </a:prstGeom>
+          <a:solidFill>
+            <a:srgbClr val="C7800E"/>
+          </a:solidFill>
+          <a:ln w="12700">
+            <a:solidFill>
+              <a:srgbClr val="FFFFFF"/>
+            </a:solidFill>
+          </a:ln>
+          <a:effectLst/>
+        </p:spPr>
+        <p:style>
+          <a:lnRef idx="1">
+            <a:schemeClr val="accent1"/>
+          </a:lnRef>
+          <a:fillRef idx="3">
+            <a:schemeClr val="accent1"/>
+          </a:fillRef>
+          <a:effectRef idx="2">
+            <a:schemeClr val="accent1"/>
+          </a:effectRef>
+          <a:fontRef idx="minor">
+            <a:schemeClr val="lt1"/>
+          </a:fontRef>
+        </p:style>
+        <p:txBody>
+          <a:bodyPr wrap="square" lIns="18000" tIns="9000" rIns="18000" bIns="9000" rtlCol="0" anchor="ctr"/>
+          <a:lstStyle/>
+          <a:p>
+            <a:pPr algn="ctr"/>
+            <a:r>
+              <a:rPr lang="en-US" sz="1100" b="1" dirty="0">
+                <a:solidFill>
+                  <a:srgbClr val="FFFFFF"/>
+                </a:solidFill>
+              </a:rPr>
+              <a:t>CD16</a:t>
+            </a:r>
+            <a:br>
+              <a:rPr lang="en-US" sz="1100" b="1" dirty="0">
+                <a:solidFill>
+                  <a:srgbClr val="FFFFFF"/>
+                </a:solidFill>
+              </a:rPr>
+            </a:br>
+            <a:r>
+              <a:rPr lang="en-US" sz="1100" b="1" dirty="0">
+                <a:solidFill>
+                  <a:srgbClr val="FFFFFF"/>
+                </a:solidFill>
+              </a:rPr>
+              <a:t>Monocyte</a:t>
+            </a:r>
+            <a:endParaRPr sz="1100" b="1" dirty="0">
+              <a:solidFill>
+                <a:srgbClr val="FFFFFF"/>
+              </a:solidFill>
+            </a:endParaRPr>
+          </a:p>
+        </p:txBody>
+      </p:sp>
+      <p:cxnSp>
+        <p:nvCxnSpPr>
+          <p:cNvPr id="271" name="Connector 56">
+            <a:extLst>
+              <a:ext uri="{FF2B5EF4-FFF2-40B4-BE49-F238E27FC236}">
+                <a16:creationId xmlns:a16="http://schemas.microsoft.com/office/drawing/2014/main" id="{FAE736E1-AE7C-7BC3-79B9-24FDC8F75FE5}"/>
+              </a:ext>
+            </a:extLst>
+          </p:cNvPr>
+          <p:cNvCxnSpPr>
+            <a:cxnSpLocks/>
+            <a:stCxn id="17" idx="4"/>
+            <a:endCxn id="269" idx="0"/>
+          </p:cNvCxnSpPr>
+          <p:nvPr/>
+        </p:nvCxnSpPr>
+        <p:spPr>
+          <a:xfrm flipH="1">
+            <a:off x="3709651" y="8987251"/>
+            <a:ext cx="845825" cy="401371"/>
+          </a:xfrm>
+          <a:prstGeom prst="line">
+            <a:avLst/>
+          </a:prstGeom>
+          <a:ln w="12700">
+            <a:solidFill>
+              <a:srgbClr val="2C3E50"/>
+            </a:solidFill>
+            <a:tailEnd type="triangle" w="med"/>
+          </a:ln>
+          <a:effectLst/>
+        </p:spPr>
+        <p:style>
+          <a:lnRef idx="2">
+            <a:schemeClr val="accent1"/>
+          </a:lnRef>
+          <a:fillRef idx="0">
+            <a:schemeClr val="accent1"/>
+          </a:fillRef>
+          <a:effectRef idx="1">
+            <a:schemeClr val="accent1"/>
+          </a:effectRef>
+          <a:fontRef idx="minor">
+            <a:schemeClr val="tx1"/>
+          </a:fontRef>
+        </p:style>
+      </p:cxnSp>
+      <p:cxnSp>
+        <p:nvCxnSpPr>
+          <p:cNvPr id="274" name="Connector 56">
+            <a:extLst>
+              <a:ext uri="{FF2B5EF4-FFF2-40B4-BE49-F238E27FC236}">
+                <a16:creationId xmlns:a16="http://schemas.microsoft.com/office/drawing/2014/main" id="{A26F720B-BFAB-67BD-0E34-49EBE6FA1C35}"/>
+              </a:ext>
+            </a:extLst>
+          </p:cNvPr>
+          <p:cNvCxnSpPr>
+            <a:cxnSpLocks/>
+            <a:stCxn id="17" idx="4"/>
+            <a:endCxn id="270" idx="0"/>
+          </p:cNvCxnSpPr>
+          <p:nvPr/>
+        </p:nvCxnSpPr>
+        <p:spPr>
+          <a:xfrm>
+            <a:off x="4555476" y="8987251"/>
+            <a:ext cx="536937" cy="401371"/>
+          </a:xfrm>
+          <a:prstGeom prst="line">
+            <a:avLst/>
+          </a:prstGeom>
+          <a:ln w="12700">
+            <a:solidFill>
+              <a:srgbClr val="2C3E50"/>
+            </a:solidFill>
+            <a:tailEnd type="triangle" w="med"/>
+          </a:ln>
+          <a:effectLst/>
+        </p:spPr>
+        <p:style>
+          <a:lnRef idx="2">
+            <a:schemeClr val="accent1"/>
+          </a:lnRef>
+          <a:fillRef idx="0">
+            <a:schemeClr val="accent1"/>
+          </a:fillRef>
+          <a:effectRef idx="1">
+            <a:schemeClr val="accent1"/>
+          </a:effectRef>
+          <a:fontRef idx="minor">
+            <a:schemeClr val="tx1"/>
+          </a:fontRef>
+        </p:style>
+      </p:cxnSp>
     </p:spTree>
   </p:cSld>
   <p:clrMapOvr>
